--- a/ML_LAB_MINI_PPT_2117240030024.pptx
+++ b/ML_LAB_MINI_PPT_2117240030024.pptx
@@ -4423,7 +4423,7 @@
           </a:bodyPr>
           <a:lstStyle/>
           <a:p>
-            <a:pPr marL="0" indent="0">
+            <a:pPr marL="0" indent="0" algn="just">
               <a:buNone/>
             </a:pPr>
             <a:r>
@@ -4432,18 +4432,21 @@
             </a:r>
           </a:p>
           <a:p>
+            <a:pPr algn="just"/>
             <a:r>
               <a:rPr lang="en-US" sz="2400" dirty="0"/>
               <a:t>Machine Learning enables systems to learn patterns from data and make predictions without explicit programming</a:t>
             </a:r>
           </a:p>
           <a:p>
+            <a:pPr algn="just"/>
             <a:r>
               <a:rPr lang="en-US" sz="2400" dirty="0"/>
               <a:t>Agriculture is the backbone of developing economies and crop yield prediction is critical for planning</a:t>
             </a:r>
           </a:p>
           <a:p>
+            <a:pPr algn="just"/>
             <a:r>
               <a:rPr lang="en-US" sz="2400" dirty="0"/>
               <a:t>Traditional yield prediction methods rely on expert knowledge and historical averages — often inaccurate</a:t>
@@ -4451,7 +4454,7 @@
             <a:endParaRPr lang="en-US" sz="2600" dirty="0"/>
           </a:p>
           <a:p>
-            <a:pPr marL="0" indent="0">
+            <a:pPr marL="0" indent="0" algn="just">
               <a:buNone/>
             </a:pPr>
             <a:r>
@@ -4460,6 +4463,7 @@
             </a:r>
           </a:p>
           <a:p>
+            <a:pPr algn="just"/>
             <a:r>
               <a:rPr lang="en-US" sz="2600" dirty="0"/>
               <a:t>P</a:t>
@@ -4471,6 +4475,7 @@
             <a:endParaRPr lang="en-US" sz="2600" dirty="0"/>
           </a:p>
           <a:p>
+            <a:pPr algn="just"/>
             <a:r>
               <a:rPr lang="en-US" sz="2400" dirty="0"/>
               <a:t>Train and compare multiple regression models to identify the best-performing approach</a:t>
@@ -4481,7 +4486,7 @@
             </a:r>
           </a:p>
           <a:p>
-            <a:pPr marL="0" indent="0">
+            <a:pPr marL="0" indent="0" algn="just">
               <a:buNone/>
             </a:pPr>
             <a:r>
@@ -4490,6 +4495,7 @@
             </a:r>
           </a:p>
           <a:p>
+            <a:pPr algn="just"/>
             <a:r>
               <a:rPr lang="en-US" sz="2600" dirty="0"/>
               <a:t>B</a:t>
@@ -4501,6 +4507,7 @@
             <a:endParaRPr lang="en-US" sz="2600" dirty="0"/>
           </a:p>
           <a:p>
+            <a:pPr algn="just"/>
             <a:r>
               <a:rPr lang="en-US" sz="2600" dirty="0"/>
               <a:t>C</a:t>
@@ -4512,6 +4519,7 @@
             <a:endParaRPr lang="en-US" sz="2600" dirty="0"/>
           </a:p>
           <a:p>
+            <a:pPr algn="just"/>
             <a:r>
               <a:rPr lang="en-US" sz="2600" dirty="0"/>
               <a:t>A</a:t>
@@ -4523,6 +4531,7 @@
             <a:endParaRPr lang="en-US" sz="2600" dirty="0"/>
           </a:p>
           <a:p>
+            <a:pPr algn="just"/>
             <a:r>
               <a:rPr lang="en-US" sz="2600" dirty="0"/>
               <a:t>P</a:t>
@@ -5007,7 +5016,7 @@
           <a:bodyPr/>
           <a:lstStyle/>
           <a:p>
-            <a:pPr marL="0" indent="0">
+            <a:pPr marL="0" indent="0" algn="just">
               <a:buNone/>
             </a:pPr>
             <a:r>
@@ -5016,12 +5025,14 @@
             </a:r>
           </a:p>
           <a:p>
+            <a:pPr algn="just"/>
             <a:r>
               <a:rPr lang="en-US" sz="2400" dirty="0"/>
               <a:t>Step 1 → Load dataset (crop_yield.csv) with 10 features and 1 target variable</a:t>
             </a:r>
           </a:p>
           <a:p>
+            <a:pPr algn="just"/>
             <a:r>
               <a:rPr lang="en-US" sz="2400" dirty="0"/>
               <a:t>Step 2 → Preprocess: encode categorical columns, convert </a:t>
@@ -5041,6 +5052,7 @@
             <a:endParaRPr lang="en-IN" sz="2200" dirty="0"/>
           </a:p>
           <a:p>
+            <a:pPr algn="just"/>
             <a:r>
               <a:rPr lang="en-US" sz="2400" dirty="0"/>
               <a:t>Step 3 → Split data: 80% training, 20% testing with </a:t>
@@ -5055,18 +5067,21 @@
             </a:r>
           </a:p>
           <a:p>
+            <a:pPr algn="just"/>
             <a:r>
               <a:rPr lang="en-US" sz="2400" dirty="0"/>
               <a:t>Step 4 → Train all four regression models on the same training set</a:t>
             </a:r>
           </a:p>
           <a:p>
+            <a:pPr algn="just"/>
             <a:r>
               <a:rPr lang="en-US" sz="2400" dirty="0"/>
               <a:t>Step 5 → Evaluate each model using R², MSE, and MAE on the test set</a:t>
             </a:r>
           </a:p>
           <a:p>
+            <a:pPr algn="just"/>
             <a:r>
               <a:rPr lang="en-US" sz="2400" dirty="0"/>
               <a:t>Step 6 → Apply K-Means Clustering on Rainfall, Temperature, Days to Harvest, and Yield</a:t>
@@ -5074,6 +5089,7 @@
             <a:endParaRPr lang="en-IN" sz="2200" dirty="0"/>
           </a:p>
           <a:p>
+            <a:pPr algn="just"/>
             <a:r>
               <a:rPr lang="en-US" sz="2400" dirty="0"/>
               <a:t>Step 7 → Visualize: model comparison chart, actual vs predicted, feature importance, clustering plot</a:t>
@@ -5349,14 +5365,14 @@
           <p:nvPr>
             <p:extLst>
               <p:ext uri="{D42A27DB-BD31-4B8C-83A1-F6EECF244321}">
-                <p14:modId xmlns:p14="http://schemas.microsoft.com/office/powerpoint/2010/main" val="2036506153"/>
+                <p14:modId xmlns:p14="http://schemas.microsoft.com/office/powerpoint/2010/main" val="3919048099"/>
               </p:ext>
             </p:extLst>
           </p:nvPr>
         </p:nvGraphicFramePr>
         <p:xfrm>
           <a:off x="609600" y="2205222"/>
-          <a:ext cx="11181348" cy="2016760"/>
+          <a:ext cx="11181348" cy="1747520"/>
         </p:xfrm>
         <a:graphic>
           <a:graphicData uri="http://schemas.openxmlformats.org/drawingml/2006/table">
@@ -5574,18 +5590,13 @@
                     <a:lstStyle/>
                     <a:p>
                       <a:r>
-                        <a:rPr lang="en-US">
+                        <a:rPr lang="en-US" dirty="0">
                           <a:solidFill>
                             <a:schemeClr val="tx1"/>
                           </a:solidFill>
                         </a:rPr>
                         <a:t>https://github.com/Devamalyaa/Smart-Agriculture-ML</a:t>
                       </a:r>
-                      <a:endParaRPr lang="en-US" dirty="0">
-                        <a:solidFill>
-                          <a:schemeClr val="tx1"/>
-                        </a:solidFill>
-                      </a:endParaRPr>
                     </a:p>
                   </a:txBody>
                   <a:tcPr>
@@ -5706,7 +5717,7 @@
                             <a:schemeClr val="tx1"/>
                           </a:solidFill>
                         </a:rPr>
-                        <a:t>https://github.com/AntoJenishia/sentiment-analyser/blob/main/AIML_AL23421_ML_MINI_PROJECT_2117240030007_IV.docx</a:t>
+                        <a:t>https://github.com/Devamalyaa/Smart-Agriculture-ML/blob/main/22.pdf</a:t>
                       </a:r>
                     </a:p>
                   </a:txBody>
@@ -5845,23 +5856,7 @@
                             <a:schemeClr val="tx1"/>
                           </a:solidFill>
                         </a:rPr>
-                        <a:t>https://github.com/AntoJenishia/sentiment-analyser/blob/main/</a:t>
-                      </a:r>
-                      <a:r>
-                        <a:rPr lang="it-IT" dirty="0">
-                          <a:solidFill>
-                            <a:schemeClr val="tx1"/>
-                          </a:solidFill>
-                        </a:rPr>
-                        <a:t>ML_LAB_MINI_PPT_2117240030007</a:t>
-                      </a:r>
-                      <a:r>
-                        <a:rPr lang="en-US" dirty="0">
-                          <a:solidFill>
-                            <a:schemeClr val="tx1"/>
-                          </a:solidFill>
-                        </a:rPr>
-                        <a:t>.pptx</a:t>
+                        <a:t>https://github.com/Devamalyaa/Smart-Agriculture-ML/blob/main/ML_LAB_MINI_PPT_2117240030024.pptx</a:t>
                       </a:r>
                     </a:p>
                   </a:txBody>
@@ -6472,7 +6467,7 @@
           </a:bodyPr>
           <a:lstStyle/>
           <a:p>
-            <a:pPr marL="0" marR="0" lvl="0" indent="0" algn="l" defTabSz="914400" rtl="0" eaLnBrk="0" fontAlgn="base" latinLnBrk="0" hangingPunct="0">
+            <a:pPr marL="0" marR="0" lvl="0" indent="0" algn="just" defTabSz="914400" rtl="0" eaLnBrk="0" fontAlgn="base" latinLnBrk="0" hangingPunct="0">
               <a:lnSpc>
                 <a:spcPct val="100000"/>
               </a:lnSpc>
@@ -6503,7 +6498,7 @@
             </a:r>
           </a:p>
           <a:p>
-            <a:pPr marL="0" marR="0" lvl="0" indent="0" algn="l" defTabSz="914400" rtl="0" eaLnBrk="0" fontAlgn="base" latinLnBrk="0" hangingPunct="0">
+            <a:pPr marL="0" marR="0" lvl="0" indent="0" algn="just" defTabSz="914400" rtl="0" eaLnBrk="0" fontAlgn="base" latinLnBrk="0" hangingPunct="0">
               <a:lnSpc>
                 <a:spcPct val="100000"/>
               </a:lnSpc>
@@ -6534,7 +6529,7 @@
             </a:r>
           </a:p>
           <a:p>
-            <a:pPr marL="0" marR="0" lvl="0" indent="0" algn="l" defTabSz="914400" rtl="0" eaLnBrk="0" fontAlgn="base" latinLnBrk="0" hangingPunct="0">
+            <a:pPr marL="0" marR="0" lvl="0" indent="0" algn="just" defTabSz="914400" rtl="0" eaLnBrk="0" fontAlgn="base" latinLnBrk="0" hangingPunct="0">
               <a:lnSpc>
                 <a:spcPct val="100000"/>
               </a:lnSpc>
@@ -6565,7 +6560,7 @@
             </a:r>
           </a:p>
           <a:p>
-            <a:pPr marL="0" marR="0" lvl="0" indent="0" algn="l" defTabSz="914400" rtl="0" eaLnBrk="0" fontAlgn="base" latinLnBrk="0" hangingPunct="0">
+            <a:pPr marL="0" marR="0" lvl="0" indent="0" algn="just" defTabSz="914400" rtl="0" eaLnBrk="0" fontAlgn="base" latinLnBrk="0" hangingPunct="0">
               <a:lnSpc>
                 <a:spcPct val="100000"/>
               </a:lnSpc>
@@ -6622,7 +6617,7 @@
             </a:r>
           </a:p>
           <a:p>
-            <a:pPr marL="0" marR="0" lvl="0" indent="0" algn="l" defTabSz="914400" rtl="0" eaLnBrk="0" fontAlgn="base" latinLnBrk="0" hangingPunct="0">
+            <a:pPr marL="0" marR="0" lvl="0" indent="0" algn="just" defTabSz="914400" rtl="0" eaLnBrk="0" fontAlgn="base" latinLnBrk="0" hangingPunct="0">
               <a:lnSpc>
                 <a:spcPct val="100000"/>
               </a:lnSpc>
@@ -6653,7 +6648,7 @@
             </a:r>
           </a:p>
           <a:p>
-            <a:pPr marL="0" marR="0" lvl="0" indent="0" algn="l" defTabSz="914400" rtl="0" eaLnBrk="0" fontAlgn="base" latinLnBrk="0" hangingPunct="0">
+            <a:pPr marL="0" marR="0" lvl="0" indent="0" algn="just" defTabSz="914400" rtl="0" eaLnBrk="0" fontAlgn="base" latinLnBrk="0" hangingPunct="0">
               <a:lnSpc>
                 <a:spcPct val="100000"/>
               </a:lnSpc>
@@ -6684,7 +6679,7 @@
             </a:r>
           </a:p>
           <a:p>
-            <a:pPr marL="0" marR="0" lvl="0" indent="0" algn="l" defTabSz="914400" rtl="0" eaLnBrk="0" fontAlgn="base" latinLnBrk="0" hangingPunct="0">
+            <a:pPr marL="0" marR="0" lvl="0" indent="0" algn="just" defTabSz="914400" rtl="0" eaLnBrk="0" fontAlgn="base" latinLnBrk="0" hangingPunct="0">
               <a:lnSpc>
                 <a:spcPct val="100000"/>
               </a:lnSpc>
@@ -6715,7 +6710,7 @@
             </a:r>
           </a:p>
           <a:p>
-            <a:pPr marL="0" marR="0" lvl="0" indent="0" algn="l" defTabSz="914400" rtl="0" eaLnBrk="0" fontAlgn="base" latinLnBrk="0" hangingPunct="0">
+            <a:pPr marL="0" marR="0" lvl="0" indent="0" algn="just" defTabSz="914400" rtl="0" eaLnBrk="0" fontAlgn="base" latinLnBrk="0" hangingPunct="0">
               <a:lnSpc>
                 <a:spcPct val="100000"/>
               </a:lnSpc>
